--- a/goal4.pptx
+++ b/goal4.pptx
@@ -5,11 +5,11 @@
     <p:sldMasterId id="2147483660" r:id="rId1"/>
   </p:sldMasterIdLst>
   <p:notesMasterIdLst>
-    <p:notesMasterId r:id="rId17"/>
+    <p:notesMasterId r:id="rId18"/>
   </p:notesMasterIdLst>
   <p:sldIdLst>
-    <p:sldId id="256" r:id="rId2"/>
-    <p:sldId id="257" r:id="rId3"/>
+    <p:sldId id="257" r:id="rId2"/>
+    <p:sldId id="256" r:id="rId3"/>
     <p:sldId id="258" r:id="rId4"/>
     <p:sldId id="259" r:id="rId5"/>
     <p:sldId id="260" r:id="rId6"/>
@@ -22,7 +22,8 @@
     <p:sldId id="267" r:id="rId13"/>
     <p:sldId id="269" r:id="rId14"/>
     <p:sldId id="270" r:id="rId15"/>
-    <p:sldId id="271" r:id="rId16"/>
+    <p:sldId id="272" r:id="rId16"/>
+    <p:sldId id="271" r:id="rId17"/>
   </p:sldIdLst>
   <p:sldSz cx="9144000" cy="6858000" type="screen4x3"/>
   <p:notesSz cx="6858000" cy="9144000"/>
@@ -121,6 +122,11 @@
       </a:defRPr>
     </a:lvl9pPr>
   </p:defaultTextStyle>
+  <p:extLst>
+    <p:ext uri="{EFAFB233-063F-42B5-8137-9DF3F51BA10A}">
+      <p15:sldGuideLst xmlns:p15="http://schemas.microsoft.com/office/powerpoint/2012/main"/>
+    </p:ext>
+  </p:extLst>
 </p:presentation>
 </file>
 
@@ -662,7 +668,13 @@
   <p:cSld>
     <p:spTree>
       <p:nvGrpSpPr>
-        <p:cNvPr id="1" name=""/>
+        <p:cNvPr id="1" name="">
+          <a:extLst>
+            <a:ext uri="{FF2B5EF4-FFF2-40B4-BE49-F238E27FC236}">
+              <a16:creationId xmlns:a16="http://schemas.microsoft.com/office/drawing/2014/main" id="{C5C41E71-5605-7541-1193-AC0D68736B9A}"/>
+            </a:ext>
+          </a:extLst>
+        </p:cNvPr>
         <p:cNvGrpSpPr/>
         <p:nvPr/>
       </p:nvGrpSpPr>
@@ -676,7 +688,13 @@
       </p:grpSpPr>
       <p:sp>
         <p:nvSpPr>
-          <p:cNvPr id="2" name="Slide Image Placeholder 1"/>
+          <p:cNvPr id="2" name="Slide Image Placeholder 1">
+            <a:extLst>
+              <a:ext uri="{FF2B5EF4-FFF2-40B4-BE49-F238E27FC236}">
+                <a16:creationId xmlns:a16="http://schemas.microsoft.com/office/drawing/2014/main" id="{12A633AB-B221-A446-D333-E8C2B0DC3457}"/>
+              </a:ext>
+            </a:extLst>
+          </p:cNvPr>
           <p:cNvSpPr>
             <a:spLocks noGrp="1" noRot="1" noChangeAspect="1"/>
           </p:cNvSpPr>
@@ -688,7 +706,13 @@
       </p:sp>
       <p:sp>
         <p:nvSpPr>
-          <p:cNvPr id="3" name="Notes Placeholder 2"/>
+          <p:cNvPr id="3" name="Notes Placeholder 2">
+            <a:extLst>
+              <a:ext uri="{FF2B5EF4-FFF2-40B4-BE49-F238E27FC236}">
+                <a16:creationId xmlns:a16="http://schemas.microsoft.com/office/drawing/2014/main" id="{B33DC72D-8FEA-6BDA-B73A-9B12E6AA0B3F}"/>
+              </a:ext>
+            </a:extLst>
+          </p:cNvPr>
           <p:cNvSpPr>
             <a:spLocks noGrp="1"/>
           </p:cNvSpPr>
@@ -783,6 +807,172 @@
       </p:sp>
       <p:sp>
         <p:nvSpPr>
+          <p:cNvPr id="4" name="Slide Number Placeholder 3">
+            <a:extLst>
+              <a:ext uri="{FF2B5EF4-FFF2-40B4-BE49-F238E27FC236}">
+                <a16:creationId xmlns:a16="http://schemas.microsoft.com/office/drawing/2014/main" id="{F77E8DDF-6E3A-B66D-EF06-7F8D9F5C4D07}"/>
+              </a:ext>
+            </a:extLst>
+          </p:cNvPr>
+          <p:cNvSpPr>
+            <a:spLocks noGrp="1"/>
+          </p:cNvSpPr>
+          <p:nvPr>
+            <p:ph type="sldNum" sz="quarter" idx="5"/>
+          </p:nvPr>
+        </p:nvSpPr>
+        <p:spPr/>
+        <p:txBody>
+          <a:bodyPr/>
+          <a:lstStyle/>
+          <a:p>
+            <a:fld id="{132B3AFE-821E-CE4C-8B6A-CCFAF36402F6}" type="slidenum">
+              <a:rPr lang="en-US" smtClean="0"/>
+              <a:t>15</a:t>
+            </a:fld>
+            <a:endParaRPr lang="en-US"/>
+          </a:p>
+        </p:txBody>
+      </p:sp>
+    </p:spTree>
+    <p:extLst>
+      <p:ext uri="{BB962C8B-B14F-4D97-AF65-F5344CB8AC3E}">
+        <p14:creationId xmlns:p14="http://schemas.microsoft.com/office/powerpoint/2010/main" val="1100195249"/>
+      </p:ext>
+    </p:extLst>
+  </p:cSld>
+  <p:clrMapOvr>
+    <a:masterClrMapping/>
+  </p:clrMapOvr>
+</p:notes>
+</file>
+
+<file path=ppt/notesSlides/notesSlide4.xml><?xml version="1.0" encoding="utf-8"?>
+<p:notes xmlns:a="http://schemas.openxmlformats.org/drawingml/2006/main" xmlns:r="http://schemas.openxmlformats.org/officeDocument/2006/relationships" xmlns:p="http://schemas.openxmlformats.org/presentationml/2006/main">
+  <p:cSld>
+    <p:spTree>
+      <p:nvGrpSpPr>
+        <p:cNvPr id="1" name=""/>
+        <p:cNvGrpSpPr/>
+        <p:nvPr/>
+      </p:nvGrpSpPr>
+      <p:grpSpPr>
+        <a:xfrm>
+          <a:off x="0" y="0"/>
+          <a:ext cx="0" cy="0"/>
+          <a:chOff x="0" y="0"/>
+          <a:chExt cx="0" cy="0"/>
+        </a:xfrm>
+      </p:grpSpPr>
+      <p:sp>
+        <p:nvSpPr>
+          <p:cNvPr id="2" name="Slide Image Placeholder 1"/>
+          <p:cNvSpPr>
+            <a:spLocks noGrp="1" noRot="1" noChangeAspect="1"/>
+          </p:cNvSpPr>
+          <p:nvPr>
+            <p:ph type="sldImg"/>
+          </p:nvPr>
+        </p:nvSpPr>
+        <p:spPr/>
+      </p:sp>
+      <p:sp>
+        <p:nvSpPr>
+          <p:cNvPr id="3" name="Notes Placeholder 2"/>
+          <p:cNvSpPr>
+            <a:spLocks noGrp="1"/>
+          </p:cNvSpPr>
+          <p:nvPr>
+            <p:ph type="body" idx="1"/>
+          </p:nvPr>
+        </p:nvSpPr>
+        <p:spPr/>
+        <p:txBody>
+          <a:bodyPr/>
+          <a:lstStyle/>
+          <a:p>
+            <a:r>
+              <a:rPr lang="en-US" dirty="0"/>
+              <a:t>Stamp: https://</a:t>
+            </a:r>
+            <a:r>
+              <a:rPr lang="en-US" dirty="0" err="1"/>
+              <a:t>www.qclabels.com</a:t>
+            </a:r>
+            <a:r>
+              <a:rPr lang="en-US" dirty="0"/>
+              <a:t>/rejected-date-inspection-self-inked-stamp/sku-is-0114</a:t>
+            </a:r>
+          </a:p>
+          <a:p>
+            <a:pPr marL="0" marR="0" lvl="0" indent="0" algn="l" defTabSz="914400" rtl="0" eaLnBrk="1" fontAlgn="auto" latinLnBrk="0" hangingPunct="1">
+              <a:lnSpc>
+                <a:spcPct val="100000"/>
+              </a:lnSpc>
+              <a:spcBef>
+                <a:spcPts val="0"/>
+              </a:spcBef>
+              <a:spcAft>
+                <a:spcPts val="0"/>
+              </a:spcAft>
+              <a:buClrTx/>
+              <a:buSzTx/>
+              <a:buFontTx/>
+              <a:buNone/>
+              <a:tabLst/>
+              <a:defRPr/>
+            </a:pPr>
+            <a:r>
+              <a:rPr lang="en-US" dirty="0"/>
+              <a:t>Block: https://</a:t>
+            </a:r>
+            <a:r>
+              <a:rPr lang="en-US" dirty="0" err="1"/>
+              <a:t>cdn.nba.com</a:t>
+            </a:r>
+            <a:r>
+              <a:rPr lang="en-US" dirty="0"/>
+              <a:t>/teams/legacy/</a:t>
+            </a:r>
+            <a:r>
+              <a:rPr lang="en-US" dirty="0" err="1"/>
+              <a:t>www.nba.com</a:t>
+            </a:r>
+            <a:r>
+              <a:rPr lang="en-US" dirty="0"/>
+              <a:t>/nuggets/sites/nuggets/files/52563801_10.jpg</a:t>
+            </a:r>
+          </a:p>
+          <a:p>
+            <a:r>
+              <a:rPr lang="en-US" dirty="0" err="1"/>
+              <a:t>Mutumbo</a:t>
+            </a:r>
+            <a:r>
+              <a:rPr lang="en-US" dirty="0"/>
+              <a:t> gloating: https://</a:t>
+            </a:r>
+            <a:r>
+              <a:rPr lang="en-US" dirty="0" err="1"/>
+              <a:t>www.basketballnetwork.net</a:t>
+            </a:r>
+            <a:r>
+              <a:rPr lang="en-US" dirty="0"/>
+              <a:t>/.image/</a:t>
+            </a:r>
+            <a:r>
+              <a:rPr lang="en-US" dirty="0" err="1"/>
+              <a:t>t_share</a:t>
+            </a:r>
+            <a:r>
+              <a:rPr lang="en-US" dirty="0"/>
+              <a:t>/MTg3MTYwOTUzNDIzNDcyNTI2/dikembe-1.jpg</a:t>
+            </a:r>
+          </a:p>
+        </p:txBody>
+      </p:sp>
+      <p:sp>
+        <p:nvSpPr>
           <p:cNvPr id="4" name="Slide Number Placeholder 3"/>
           <p:cNvSpPr>
             <a:spLocks noGrp="1"/>
@@ -798,7 +988,7 @@
           <a:p>
             <a:fld id="{132B3AFE-821E-CE4C-8B6A-CCFAF36402F6}" type="slidenum">
               <a:rPr lang="en-US" smtClean="0"/>
-              <a:t>15</a:t>
+              <a:t>16</a:t>
             </a:fld>
             <a:endParaRPr lang="en-US"/>
           </a:p>
@@ -3680,74 +3870,219 @@
       </p:grpSpPr>
       <p:sp>
         <p:nvSpPr>
-          <p:cNvPr id="2" name="Title 1">
+          <p:cNvPr id="4" name="TextBox 3">
             <a:extLst>
               <a:ext uri="{FF2B5EF4-FFF2-40B4-BE49-F238E27FC236}">
-                <a16:creationId xmlns:a16="http://schemas.microsoft.com/office/drawing/2014/main" id="{CE08F125-9BE4-CD98-13CC-BE81DCDE077A}"/>
+                <a16:creationId xmlns:a16="http://schemas.microsoft.com/office/drawing/2014/main" id="{7FE70CF0-BC99-6054-6516-D8192B3332C9}"/>
               </a:ext>
             </a:extLst>
           </p:cNvPr>
-          <p:cNvSpPr>
-            <a:spLocks noGrp="1"/>
-          </p:cNvSpPr>
-          <p:nvPr>
-            <p:ph type="ctrTitle"/>
-          </p:nvPr>
+          <p:cNvSpPr txBox="1"/>
+          <p:nvPr/>
         </p:nvSpPr>
         <p:spPr>
           <a:xfrm>
-            <a:off x="685800" y="1297461"/>
-            <a:ext cx="7772400" cy="2387600"/>
+            <a:off x="154319" y="-338824"/>
+            <a:ext cx="6783572" cy="584775"/>
           </a:xfrm>
+          <a:prstGeom prst="rect">
+            <a:avLst/>
+          </a:prstGeom>
+          <a:noFill/>
         </p:spPr>
         <p:txBody>
-          <a:bodyPr>
-            <a:normAutofit fontScale="90000"/>
+          <a:bodyPr wrap="square" rtlCol="0">
+            <a:spAutoFit/>
           </a:bodyPr>
           <a:lstStyle/>
           <a:p>
             <a:r>
-              <a:rPr lang="en-US" b="1" dirty="0"/>
-              <a:t>Are recommended screening tools for adult ADHD useful?</a:t>
+              <a:rPr lang="en-US" sz="3200" b="1" dirty="0"/>
+              <a:t> </a:t>
             </a:r>
           </a:p>
         </p:txBody>
       </p:sp>
-      <p:sp>
-        <p:nvSpPr>
-          <p:cNvPr id="3" name="Subtitle 2">
+      <p:pic>
+        <p:nvPicPr>
+          <p:cNvPr id="5" name="Picture 4">
             <a:extLst>
               <a:ext uri="{FF2B5EF4-FFF2-40B4-BE49-F238E27FC236}">
-                <a16:creationId xmlns:a16="http://schemas.microsoft.com/office/drawing/2014/main" id="{4E86D373-40CD-123A-B14A-85B35FF4444F}"/>
+                <a16:creationId xmlns:a16="http://schemas.microsoft.com/office/drawing/2014/main" id="{4539A03F-3EA0-BC96-44F2-6255DFB655C2}"/>
               </a:ext>
             </a:extLst>
           </p:cNvPr>
-          <p:cNvSpPr>
-            <a:spLocks noGrp="1"/>
-          </p:cNvSpPr>
-          <p:nvPr>
-            <p:ph type="subTitle" idx="1"/>
-          </p:nvPr>
-        </p:nvSpPr>
+          <p:cNvPicPr>
+            <a:picLocks noChangeAspect="1"/>
+          </p:cNvPicPr>
+          <p:nvPr/>
+        </p:nvPicPr>
+        <p:blipFill>
+          <a:blip r:embed="rId2"/>
+          <a:stretch>
+            <a:fillRect/>
+          </a:stretch>
+        </p:blipFill>
         <p:spPr>
           <a:xfrm>
-            <a:off x="1143000" y="4177152"/>
-            <a:ext cx="6858000" cy="1655762"/>
+            <a:off x="2943047" y="3332859"/>
+            <a:ext cx="4242648" cy="2908004"/>
           </a:xfrm>
+          <a:prstGeom prst="rect">
+            <a:avLst/>
+          </a:prstGeom>
+        </p:spPr>
+      </p:pic>
+      <p:pic>
+        <p:nvPicPr>
+          <p:cNvPr id="1026" name="Picture 2" descr="OHSU Primary Care Clinic Gabriel Park building photo">
+            <a:extLst>
+              <a:ext uri="{FF2B5EF4-FFF2-40B4-BE49-F238E27FC236}">
+                <a16:creationId xmlns:a16="http://schemas.microsoft.com/office/drawing/2014/main" id="{6A0A4686-4657-DA59-5897-EEE2B728BF1F}"/>
+              </a:ext>
+            </a:extLst>
+          </p:cNvPr>
+          <p:cNvPicPr>
+            <a:picLocks noChangeAspect="1" noChangeArrowheads="1"/>
+          </p:cNvPicPr>
+          <p:nvPr/>
+        </p:nvPicPr>
+        <p:blipFill rotWithShape="1">
+          <a:blip r:embed="rId3">
+            <a:extLst>
+              <a:ext uri="{28A0092B-C50C-407E-A947-70E740481C1C}">
+                <a14:useLocalDpi xmlns:a14="http://schemas.microsoft.com/office/drawing/2010/main" val="0"/>
+              </a:ext>
+            </a:extLst>
+          </a:blip>
+          <a:srcRect l="16161" t="50000" r="13828"/>
+          <a:stretch/>
+        </p:blipFill>
+        <p:spPr bwMode="auto">
+          <a:xfrm>
+            <a:off x="1761681" y="424855"/>
+            <a:ext cx="5843058" cy="2908004"/>
+          </a:xfrm>
+          <a:prstGeom prst="rect">
+            <a:avLst/>
+          </a:prstGeom>
+          <a:noFill/>
+          <a:extLst>
+            <a:ext uri="{909E8E84-426E-40DD-AFC4-6F175D3DCCD1}">
+              <a14:hiddenFill xmlns:a14="http://schemas.microsoft.com/office/drawing/2010/main">
+                <a:solidFill>
+                  <a:srgbClr val="FFFFFF"/>
+                </a:solidFill>
+              </a14:hiddenFill>
+            </a:ext>
+          </a:extLst>
+        </p:spPr>
+      </p:pic>
+      <p:sp>
+        <p:nvSpPr>
+          <p:cNvPr id="6" name="5-Point Star 5">
+            <a:extLst>
+              <a:ext uri="{FF2B5EF4-FFF2-40B4-BE49-F238E27FC236}">
+                <a16:creationId xmlns:a16="http://schemas.microsoft.com/office/drawing/2014/main" id="{4601E845-449F-6D2F-A72D-B141945925BB}"/>
+              </a:ext>
+            </a:extLst>
+          </p:cNvPr>
+          <p:cNvSpPr/>
+          <p:nvPr/>
+        </p:nvSpPr>
+        <p:spPr>
+          <a:xfrm>
+            <a:off x="3335385" y="5722146"/>
+            <a:ext cx="274976" cy="219298"/>
+          </a:xfrm>
+          <a:prstGeom prst="star5">
+            <a:avLst/>
+          </a:prstGeom>
+          <a:solidFill>
+            <a:schemeClr val="accent5">
+              <a:lumMod val="20000"/>
+              <a:lumOff val="80000"/>
+            </a:schemeClr>
+          </a:solidFill>
+        </p:spPr>
+        <p:style>
+          <a:lnRef idx="2">
+            <a:schemeClr val="accent1">
+              <a:shade val="15000"/>
+            </a:schemeClr>
+          </a:lnRef>
+          <a:fillRef idx="1">
+            <a:schemeClr val="accent1"/>
+          </a:fillRef>
+          <a:effectRef idx="0">
+            <a:schemeClr val="accent1"/>
+          </a:effectRef>
+          <a:fontRef idx="minor">
+            <a:schemeClr val="lt1"/>
+          </a:fontRef>
+        </p:style>
+        <p:txBody>
+          <a:bodyPr rtlCol="0" anchor="ctr"/>
+          <a:lstStyle/>
+          <a:p>
+            <a:pPr algn="ctr"/>
+            <a:endParaRPr lang="en-US" dirty="0"/>
+          </a:p>
+        </p:txBody>
+      </p:sp>
+      <p:sp>
+        <p:nvSpPr>
+          <p:cNvPr id="7" name="TextBox 6">
+            <a:extLst>
+              <a:ext uri="{FF2B5EF4-FFF2-40B4-BE49-F238E27FC236}">
+                <a16:creationId xmlns:a16="http://schemas.microsoft.com/office/drawing/2014/main" id="{9F1476CD-6F5F-F09B-F90D-0936BDE2DDFB}"/>
+              </a:ext>
+            </a:extLst>
+          </p:cNvPr>
+          <p:cNvSpPr txBox="1"/>
+          <p:nvPr/>
+        </p:nvSpPr>
+        <p:spPr>
+          <a:xfrm>
+            <a:off x="13248" y="5831795"/>
+            <a:ext cx="2424510" cy="923330"/>
+          </a:xfrm>
+          <a:prstGeom prst="rect">
+            <a:avLst/>
+          </a:prstGeom>
+          <a:noFill/>
         </p:spPr>
         <p:txBody>
-          <a:bodyPr/>
+          <a:bodyPr wrap="none" rtlCol="0">
+            <a:spAutoFit/>
+          </a:bodyPr>
           <a:lstStyle/>
           <a:p>
             <a:r>
+              <a:rPr lang="en-US" b="1" dirty="0"/>
+              <a:t>Sources:</a:t>
+            </a:r>
+            <a:r>
               <a:rPr lang="en-US" dirty="0"/>
-              <a:t>Steve White</a:t>
-            </a:r>
-          </a:p>
-          <a:p>
-            <a:r>
+              <a:t> </a:t>
+            </a:r>
+            <a:r>
+              <a:rPr lang="en-US" dirty="0" err="1"/>
+              <a:t>OHSU.edu</a:t>
+            </a:r>
+            <a:endParaRPr lang="en-US" dirty="0"/>
+          </a:p>
+          <a:p>
+            <a:r>
+              <a:rPr lang="en-US" dirty="0" err="1"/>
+              <a:t>BestNeighborhood.org</a:t>
+            </a:r>
+            <a:br>
               <a:rPr lang="en-US" dirty="0"/>
-              <a:t>2/20/25</a:t>
+            </a:br>
+            <a:r>
+              <a:rPr lang="en-US" dirty="0"/>
+              <a:t>(from ACS data?)</a:t>
             </a:r>
           </a:p>
         </p:txBody>
@@ -3755,13 +4090,91 @@
     </p:spTree>
     <p:extLst>
       <p:ext uri="{BB962C8B-B14F-4D97-AF65-F5344CB8AC3E}">
-        <p14:creationId xmlns:p14="http://schemas.microsoft.com/office/powerpoint/2010/main" val="228523529"/>
+        <p14:creationId xmlns:p14="http://schemas.microsoft.com/office/powerpoint/2010/main" val="3322414952"/>
       </p:ext>
     </p:extLst>
   </p:cSld>
   <p:clrMapOvr>
     <a:masterClrMapping/>
   </p:clrMapOvr>
+  <p:timing>
+    <p:tnLst>
+      <p:par>
+        <p:cTn id="1" dur="indefinite" restart="never" nodeType="tmRoot">
+          <p:childTnLst>
+            <p:seq concurrent="1" nextAc="seek">
+              <p:cTn id="2" dur="indefinite" nodeType="mainSeq">
+                <p:childTnLst>
+                  <p:par>
+                    <p:cTn id="3" fill="hold">
+                      <p:stCondLst>
+                        <p:cond delay="indefinite"/>
+                      </p:stCondLst>
+                      <p:childTnLst>
+                        <p:par>
+                          <p:cTn id="4" fill="hold">
+                            <p:stCondLst>
+                              <p:cond delay="0"/>
+                            </p:stCondLst>
+                            <p:childTnLst>
+                              <p:par>
+                                <p:cTn id="5" presetID="1" presetClass="entr" presetSubtype="0" fill="hold" grpId="0" nodeType="clickEffect">
+                                  <p:stCondLst>
+                                    <p:cond delay="0"/>
+                                  </p:stCondLst>
+                                  <p:childTnLst>
+                                    <p:set>
+                                      <p:cBhvr>
+                                        <p:cTn id="6" dur="1" fill="hold">
+                                          <p:stCondLst>
+                                            <p:cond delay="0"/>
+                                          </p:stCondLst>
+                                        </p:cTn>
+                                        <p:tgtEl>
+                                          <p:spTgt spid="6"/>
+                                        </p:tgtEl>
+                                        <p:attrNameLst>
+                                          <p:attrName>style.visibility</p:attrName>
+                                        </p:attrNameLst>
+                                      </p:cBhvr>
+                                      <p:to>
+                                        <p:strVal val="visible"/>
+                                      </p:to>
+                                    </p:set>
+                                  </p:childTnLst>
+                                </p:cTn>
+                              </p:par>
+                            </p:childTnLst>
+                          </p:cTn>
+                        </p:par>
+                      </p:childTnLst>
+                    </p:cTn>
+                  </p:par>
+                </p:childTnLst>
+              </p:cTn>
+              <p:prevCondLst>
+                <p:cond evt="onPrev" delay="0">
+                  <p:tgtEl>
+                    <p:sldTgt/>
+                  </p:tgtEl>
+                </p:cond>
+              </p:prevCondLst>
+              <p:nextCondLst>
+                <p:cond evt="onNext" delay="0">
+                  <p:tgtEl>
+                    <p:sldTgt/>
+                  </p:tgtEl>
+                </p:cond>
+              </p:nextCondLst>
+            </p:seq>
+          </p:childTnLst>
+        </p:cTn>
+      </p:par>
+    </p:tnLst>
+    <p:bldLst>
+      <p:bldP spid="6" grpId="0" animBg="1"/>
+    </p:bldLst>
+  </p:timing>
 </p:sld>
 </file>
 
@@ -4357,52 +4770,6 @@
       </p:graphicFrame>
       <p:sp>
         <p:nvSpPr>
-          <p:cNvPr id="5" name="Oval 4">
-            <a:extLst>
-              <a:ext uri="{FF2B5EF4-FFF2-40B4-BE49-F238E27FC236}">
-                <a16:creationId xmlns:a16="http://schemas.microsoft.com/office/drawing/2014/main" id="{69E01CAC-6A46-DA0E-E475-E3A22529409C}"/>
-              </a:ext>
-            </a:extLst>
-          </p:cNvPr>
-          <p:cNvSpPr/>
-          <p:nvPr/>
-        </p:nvSpPr>
-        <p:spPr>
-          <a:xfrm>
-            <a:off x="5232400" y="2143841"/>
-            <a:ext cx="127000" cy="114300"/>
-          </a:xfrm>
-          <a:prstGeom prst="ellipse">
-            <a:avLst/>
-          </a:prstGeom>
-        </p:spPr>
-        <p:style>
-          <a:lnRef idx="2">
-            <a:schemeClr val="dk1">
-              <a:shade val="15000"/>
-            </a:schemeClr>
-          </a:lnRef>
-          <a:fillRef idx="1">
-            <a:schemeClr val="dk1"/>
-          </a:fillRef>
-          <a:effectRef idx="0">
-            <a:schemeClr val="dk1"/>
-          </a:effectRef>
-          <a:fontRef idx="minor">
-            <a:schemeClr val="lt1"/>
-          </a:fontRef>
-        </p:style>
-        <p:txBody>
-          <a:bodyPr rtlCol="0" anchor="ctr"/>
-          <a:lstStyle/>
-          <a:p>
-            <a:pPr algn="ctr"/>
-            <a:endParaRPr lang="en-US"/>
-          </a:p>
-        </p:txBody>
-      </p:sp>
-      <p:sp>
-        <p:nvSpPr>
           <p:cNvPr id="6" name="Oval 5">
             <a:extLst>
               <a:ext uri="{FF2B5EF4-FFF2-40B4-BE49-F238E27FC236}">
@@ -4508,6 +4875,52 @@
         <p:spPr>
           <a:xfrm>
             <a:off x="2835500" y="2678316"/>
+            <a:ext cx="127000" cy="114300"/>
+          </a:xfrm>
+          <a:prstGeom prst="ellipse">
+            <a:avLst/>
+          </a:prstGeom>
+        </p:spPr>
+        <p:style>
+          <a:lnRef idx="2">
+            <a:schemeClr val="dk1">
+              <a:shade val="15000"/>
+            </a:schemeClr>
+          </a:lnRef>
+          <a:fillRef idx="1">
+            <a:schemeClr val="dk1"/>
+          </a:fillRef>
+          <a:effectRef idx="0">
+            <a:schemeClr val="dk1"/>
+          </a:effectRef>
+          <a:fontRef idx="minor">
+            <a:schemeClr val="lt1"/>
+          </a:fontRef>
+        </p:style>
+        <p:txBody>
+          <a:bodyPr rtlCol="0" anchor="ctr"/>
+          <a:lstStyle/>
+          <a:p>
+            <a:pPr algn="ctr"/>
+            <a:endParaRPr lang="en-US"/>
+          </a:p>
+        </p:txBody>
+      </p:sp>
+      <p:sp>
+        <p:nvSpPr>
+          <p:cNvPr id="10" name="Oval 9">
+            <a:extLst>
+              <a:ext uri="{FF2B5EF4-FFF2-40B4-BE49-F238E27FC236}">
+                <a16:creationId xmlns:a16="http://schemas.microsoft.com/office/drawing/2014/main" id="{2E85DE5B-81DC-EB0E-82EB-9CDE017CC44D}"/>
+              </a:ext>
+            </a:extLst>
+          </p:cNvPr>
+          <p:cNvSpPr/>
+          <p:nvPr/>
+        </p:nvSpPr>
+        <p:spPr>
+          <a:xfrm>
+            <a:off x="4207510" y="2180752"/>
             <a:ext cx="127000" cy="114300"/>
           </a:xfrm>
           <a:prstGeom prst="ellipse">
@@ -5144,52 +5557,6 @@
       </p:graphicFrame>
       <p:sp>
         <p:nvSpPr>
-          <p:cNvPr id="5" name="Oval 4">
-            <a:extLst>
-              <a:ext uri="{FF2B5EF4-FFF2-40B4-BE49-F238E27FC236}">
-                <a16:creationId xmlns:a16="http://schemas.microsoft.com/office/drawing/2014/main" id="{BC4AEAB1-9F26-6A54-4F7C-C6FE559B1734}"/>
-              </a:ext>
-            </a:extLst>
-          </p:cNvPr>
-          <p:cNvSpPr/>
-          <p:nvPr/>
-        </p:nvSpPr>
-        <p:spPr>
-          <a:xfrm>
-            <a:off x="5232400" y="2143841"/>
-            <a:ext cx="127000" cy="114300"/>
-          </a:xfrm>
-          <a:prstGeom prst="ellipse">
-            <a:avLst/>
-          </a:prstGeom>
-        </p:spPr>
-        <p:style>
-          <a:lnRef idx="2">
-            <a:schemeClr val="dk1">
-              <a:shade val="15000"/>
-            </a:schemeClr>
-          </a:lnRef>
-          <a:fillRef idx="1">
-            <a:schemeClr val="dk1"/>
-          </a:fillRef>
-          <a:effectRef idx="0">
-            <a:schemeClr val="dk1"/>
-          </a:effectRef>
-          <a:fontRef idx="minor">
-            <a:schemeClr val="lt1"/>
-          </a:fontRef>
-        </p:style>
-        <p:txBody>
-          <a:bodyPr rtlCol="0" anchor="ctr"/>
-          <a:lstStyle/>
-          <a:p>
-            <a:pPr algn="ctr"/>
-            <a:endParaRPr lang="en-US"/>
-          </a:p>
-        </p:txBody>
-      </p:sp>
-      <p:sp>
-        <p:nvSpPr>
           <p:cNvPr id="6" name="Oval 5">
             <a:extLst>
               <a:ext uri="{FF2B5EF4-FFF2-40B4-BE49-F238E27FC236}">
@@ -5341,6 +5708,52 @@
         <p:spPr>
           <a:xfrm>
             <a:off x="2378300" y="3135516"/>
+            <a:ext cx="127000" cy="114300"/>
+          </a:xfrm>
+          <a:prstGeom prst="ellipse">
+            <a:avLst/>
+          </a:prstGeom>
+        </p:spPr>
+        <p:style>
+          <a:lnRef idx="2">
+            <a:schemeClr val="dk1">
+              <a:shade val="15000"/>
+            </a:schemeClr>
+          </a:lnRef>
+          <a:fillRef idx="1">
+            <a:schemeClr val="dk1"/>
+          </a:fillRef>
+          <a:effectRef idx="0">
+            <a:schemeClr val="dk1"/>
+          </a:effectRef>
+          <a:fontRef idx="minor">
+            <a:schemeClr val="lt1"/>
+          </a:fontRef>
+        </p:style>
+        <p:txBody>
+          <a:bodyPr rtlCol="0" anchor="ctr"/>
+          <a:lstStyle/>
+          <a:p>
+            <a:pPr algn="ctr"/>
+            <a:endParaRPr lang="en-US"/>
+          </a:p>
+        </p:txBody>
+      </p:sp>
+      <p:sp>
+        <p:nvSpPr>
+          <p:cNvPr id="11" name="Oval 10">
+            <a:extLst>
+              <a:ext uri="{FF2B5EF4-FFF2-40B4-BE49-F238E27FC236}">
+                <a16:creationId xmlns:a16="http://schemas.microsoft.com/office/drawing/2014/main" id="{8E533498-B58E-2F85-78F2-CFFC4F1B2816}"/>
+              </a:ext>
+            </a:extLst>
+          </p:cNvPr>
+          <p:cNvSpPr/>
+          <p:nvPr/>
+        </p:nvSpPr>
+        <p:spPr>
+          <a:xfrm>
+            <a:off x="4207510" y="2180752"/>
             <a:ext cx="127000" cy="114300"/>
           </a:xfrm>
           <a:prstGeom prst="ellipse">
@@ -5978,52 +6391,6 @@
       </p:graphicFrame>
       <p:sp>
         <p:nvSpPr>
-          <p:cNvPr id="5" name="Oval 4">
-            <a:extLst>
-              <a:ext uri="{FF2B5EF4-FFF2-40B4-BE49-F238E27FC236}">
-                <a16:creationId xmlns:a16="http://schemas.microsoft.com/office/drawing/2014/main" id="{989F7008-9A9A-41D8-3ADB-3A083292AA8C}"/>
-              </a:ext>
-            </a:extLst>
-          </p:cNvPr>
-          <p:cNvSpPr/>
-          <p:nvPr/>
-        </p:nvSpPr>
-        <p:spPr>
-          <a:xfrm>
-            <a:off x="5232400" y="2143841"/>
-            <a:ext cx="127000" cy="114300"/>
-          </a:xfrm>
-          <a:prstGeom prst="ellipse">
-            <a:avLst/>
-          </a:prstGeom>
-        </p:spPr>
-        <p:style>
-          <a:lnRef idx="2">
-            <a:schemeClr val="dk1">
-              <a:shade val="15000"/>
-            </a:schemeClr>
-          </a:lnRef>
-          <a:fillRef idx="1">
-            <a:schemeClr val="dk1"/>
-          </a:fillRef>
-          <a:effectRef idx="0">
-            <a:schemeClr val="dk1"/>
-          </a:effectRef>
-          <a:fontRef idx="minor">
-            <a:schemeClr val="lt1"/>
-          </a:fontRef>
-        </p:style>
-        <p:txBody>
-          <a:bodyPr rtlCol="0" anchor="ctr"/>
-          <a:lstStyle/>
-          <a:p>
-            <a:pPr algn="ctr"/>
-            <a:endParaRPr lang="en-US"/>
-          </a:p>
-        </p:txBody>
-      </p:sp>
-      <p:sp>
-        <p:nvSpPr>
           <p:cNvPr id="6" name="Oval 5">
             <a:extLst>
               <a:ext uri="{FF2B5EF4-FFF2-40B4-BE49-F238E27FC236}">
@@ -6305,7 +6672,7 @@
             <p:spPr>
               <a:xfrm>
                 <a:off x="3561146" y="4674039"/>
-                <a:ext cx="2021707" cy="1569660"/>
+                <a:ext cx="1824538" cy="1569660"/>
               </a:xfrm>
               <a:prstGeom prst="rect">
                 <a:avLst/>
@@ -6335,7 +6702,7 @@
                 </a14:m>
                 <a:r>
                   <a:rPr lang="en-US" sz="3200" dirty="0"/>
-                  <a:t> 4.7</a:t>
+                  <a:t> 5</a:t>
                 </a:r>
               </a:p>
               <a:p>
@@ -6359,7 +6726,7 @@
                 </a14:m>
                 <a:r>
                   <a:rPr lang="en-US" sz="3200" dirty="0"/>
-                  <a:t> 0.14</a:t>
+                  <a:t> 1/7</a:t>
                 </a:r>
               </a:p>
             </p:txBody>
@@ -6383,7 +6750,7 @@
             <p:spPr>
               <a:xfrm>
                 <a:off x="3561146" y="4674039"/>
-                <a:ext cx="2021707" cy="1569660"/>
+                <a:ext cx="1824538" cy="1569660"/>
               </a:xfrm>
               <a:prstGeom prst="rect">
                 <a:avLst/>
@@ -6391,7 +6758,7 @@
               <a:blipFill>
                 <a:blip r:embed="rId3"/>
                 <a:stretch>
-                  <a:fillRect l="-7500" t="-5645" r="-6875" b="-12097"/>
+                  <a:fillRect l="-8333" t="-5645" r="-7639" b="-12097"/>
                 </a:stretch>
               </a:blipFill>
             </p:spPr>
@@ -6410,6 +6777,52 @@
           </p:sp>
         </mc:Fallback>
       </mc:AlternateContent>
+      <p:sp>
+        <p:nvSpPr>
+          <p:cNvPr id="11" name="Oval 10">
+            <a:extLst>
+              <a:ext uri="{FF2B5EF4-FFF2-40B4-BE49-F238E27FC236}">
+                <a16:creationId xmlns:a16="http://schemas.microsoft.com/office/drawing/2014/main" id="{AB7F23DC-0E63-E1F3-C5A8-6CABEE2552EC}"/>
+              </a:ext>
+            </a:extLst>
+          </p:cNvPr>
+          <p:cNvSpPr/>
+          <p:nvPr/>
+        </p:nvSpPr>
+        <p:spPr>
+          <a:xfrm>
+            <a:off x="4207510" y="2180752"/>
+            <a:ext cx="127000" cy="114300"/>
+          </a:xfrm>
+          <a:prstGeom prst="ellipse">
+            <a:avLst/>
+          </a:prstGeom>
+        </p:spPr>
+        <p:style>
+          <a:lnRef idx="2">
+            <a:schemeClr val="dk1">
+              <a:shade val="15000"/>
+            </a:schemeClr>
+          </a:lnRef>
+          <a:fillRef idx="1">
+            <a:schemeClr val="dk1"/>
+          </a:fillRef>
+          <a:effectRef idx="0">
+            <a:schemeClr val="dk1"/>
+          </a:effectRef>
+          <a:fontRef idx="minor">
+            <a:schemeClr val="lt1"/>
+          </a:fontRef>
+        </p:style>
+        <p:txBody>
+          <a:bodyPr rtlCol="0" anchor="ctr"/>
+          <a:lstStyle/>
+          <a:p>
+            <a:pPr algn="ctr"/>
+            <a:endParaRPr lang="en-US"/>
+          </a:p>
+        </p:txBody>
+      </p:sp>
     </p:spTree>
     <p:extLst>
       <p:ext uri="{BB962C8B-B14F-4D97-AF65-F5344CB8AC3E}">
@@ -6420,162 +6833,11 @@
   <p:clrMapOvr>
     <a:masterClrMapping/>
   </p:clrMapOvr>
-  <p:timing>
-    <p:tnLst>
-      <p:par>
-        <p:cTn id="1" dur="indefinite" restart="never" nodeType="tmRoot">
-          <p:childTnLst>
-            <p:seq concurrent="1" nextAc="seek">
-              <p:cTn id="2" dur="indefinite" nodeType="mainSeq">
-                <p:childTnLst>
-                  <p:par>
-                    <p:cTn id="3" fill="hold">
-                      <p:stCondLst>
-                        <p:cond delay="indefinite"/>
-                      </p:stCondLst>
-                      <p:childTnLst>
-                        <p:par>
-                          <p:cTn id="4" fill="hold">
-                            <p:stCondLst>
-                              <p:cond delay="0"/>
-                            </p:stCondLst>
-                            <p:childTnLst>
-                              <p:par>
-                                <p:cTn id="5" presetID="1" presetClass="entr" presetSubtype="0" fill="hold" nodeType="clickEffect">
-                                  <p:stCondLst>
-                                    <p:cond delay="0"/>
-                                  </p:stCondLst>
-                                  <p:childTnLst>
-                                    <p:set>
-                                      <p:cBhvr>
-                                        <p:cTn id="6" dur="1" fill="hold">
-                                          <p:stCondLst>
-                                            <p:cond delay="0"/>
-                                          </p:stCondLst>
-                                        </p:cTn>
-                                        <p:tgtEl>
-                                          <p:spTgt spid="12"/>
-                                        </p:tgtEl>
-                                        <p:attrNameLst>
-                                          <p:attrName>style.visibility</p:attrName>
-                                        </p:attrNameLst>
-                                      </p:cBhvr>
-                                      <p:to>
-                                        <p:strVal val="visible"/>
-                                      </p:to>
-                                    </p:set>
-                                  </p:childTnLst>
-                                </p:cTn>
-                              </p:par>
-                              <p:par>
-                                <p:cTn id="7" presetID="1" presetClass="entr" presetSubtype="0" fill="hold" grpId="0" nodeType="withEffect">
-                                  <p:stCondLst>
-                                    <p:cond delay="0"/>
-                                  </p:stCondLst>
-                                  <p:childTnLst>
-                                    <p:set>
-                                      <p:cBhvr>
-                                        <p:cTn id="8" dur="1" fill="hold">
-                                          <p:stCondLst>
-                                            <p:cond delay="0"/>
-                                          </p:stCondLst>
-                                        </p:cTn>
-                                        <p:tgtEl>
-                                          <p:spTgt spid="14"/>
-                                        </p:tgtEl>
-                                        <p:attrNameLst>
-                                          <p:attrName>style.visibility</p:attrName>
-                                        </p:attrNameLst>
-                                      </p:cBhvr>
-                                      <p:to>
-                                        <p:strVal val="visible"/>
-                                      </p:to>
-                                    </p:set>
-                                  </p:childTnLst>
-                                </p:cTn>
-                              </p:par>
-                            </p:childTnLst>
-                          </p:cTn>
-                        </p:par>
-                      </p:childTnLst>
-                    </p:cTn>
-                  </p:par>
-                  <p:par>
-                    <p:cTn id="9" fill="hold">
-                      <p:stCondLst>
-                        <p:cond delay="indefinite"/>
-                      </p:stCondLst>
-                      <p:childTnLst>
-                        <p:par>
-                          <p:cTn id="10" fill="hold">
-                            <p:stCondLst>
-                              <p:cond delay="0"/>
-                            </p:stCondLst>
-                            <p:childTnLst>
-                              <p:par>
-                                <p:cTn id="11" presetID="1" presetClass="entr" presetSubtype="0" fill="hold" grpId="0" nodeType="clickEffect">
-                                  <p:stCondLst>
-                                    <p:cond delay="0"/>
-                                  </p:stCondLst>
-                                  <p:childTnLst>
-                                    <p:set>
-                                      <p:cBhvr>
-                                        <p:cTn id="12" dur="1" fill="hold">
-                                          <p:stCondLst>
-                                            <p:cond delay="0"/>
-                                          </p:stCondLst>
-                                        </p:cTn>
-                                        <p:tgtEl>
-                                          <p:spTgt spid="17"/>
-                                        </p:tgtEl>
-                                        <p:attrNameLst>
-                                          <p:attrName>style.visibility</p:attrName>
-                                        </p:attrNameLst>
-                                      </p:cBhvr>
-                                      <p:to>
-                                        <p:strVal val="visible"/>
-                                      </p:to>
-                                    </p:set>
-                                  </p:childTnLst>
-                                </p:cTn>
-                              </p:par>
-                            </p:childTnLst>
-                          </p:cTn>
-                        </p:par>
-                      </p:childTnLst>
-                    </p:cTn>
-                  </p:par>
-                </p:childTnLst>
-              </p:cTn>
-              <p:prevCondLst>
-                <p:cond evt="onPrev" delay="0">
-                  <p:tgtEl>
-                    <p:sldTgt/>
-                  </p:tgtEl>
-                </p:cond>
-              </p:prevCondLst>
-              <p:nextCondLst>
-                <p:cond evt="onNext" delay="0">
-                  <p:tgtEl>
-                    <p:sldTgt/>
-                  </p:tgtEl>
-                </p:cond>
-              </p:nextCondLst>
-            </p:seq>
-          </p:childTnLst>
-        </p:cTn>
-      </p:par>
-    </p:tnLst>
-    <p:bldLst>
-      <p:bldP spid="14" grpId="0"/>
-      <p:bldP spid="17" grpId="0"/>
-    </p:bldLst>
-  </p:timing>
 </p:sld>
 </file>
 
 <file path=ppt/slides/slide13.xml><?xml version="1.0" encoding="utf-8"?>
-<p:sld xmlns:a="http://schemas.openxmlformats.org/drawingml/2006/main" xmlns:r="http://schemas.openxmlformats.org/officeDocument/2006/relationships" xmlns:p="http://schemas.openxmlformats.org/presentationml/2006/main">
+<p:sld xmlns:a="http://schemas.openxmlformats.org/drawingml/2006/main" xmlns:r="http://schemas.openxmlformats.org/officeDocument/2006/relationships" xmlns:p="http://schemas.openxmlformats.org/presentationml/2006/main" show="0">
   <p:cSld>
     <p:spTree>
       <p:nvGrpSpPr>
@@ -7079,7 +7341,7 @@
             </a:r>
             <a:r>
               <a:rPr lang="en-US" dirty="0"/>
-              <a:t>?!?!?!?!</a:t>
+              <a:t>?</a:t>
             </a:r>
           </a:p>
           <a:p>
@@ -7579,6 +7841,329 @@
 
 <file path=ppt/slides/slide15.xml><?xml version="1.0" encoding="utf-8"?>
 <p:sld xmlns:a="http://schemas.openxmlformats.org/drawingml/2006/main" xmlns:r="http://schemas.openxmlformats.org/officeDocument/2006/relationships" xmlns:p="http://schemas.openxmlformats.org/presentationml/2006/main">
+  <p:cSld>
+    <p:spTree>
+      <p:nvGrpSpPr>
+        <p:cNvPr id="1" name="">
+          <a:extLst>
+            <a:ext uri="{FF2B5EF4-FFF2-40B4-BE49-F238E27FC236}">
+              <a16:creationId xmlns:a16="http://schemas.microsoft.com/office/drawing/2014/main" id="{6CC64528-645F-0AF1-FB1A-569EE1D370CC}"/>
+            </a:ext>
+          </a:extLst>
+        </p:cNvPr>
+        <p:cNvGrpSpPr/>
+        <p:nvPr/>
+      </p:nvGrpSpPr>
+      <p:grpSpPr>
+        <a:xfrm>
+          <a:off x="0" y="0"/>
+          <a:ext cx="0" cy="0"/>
+          <a:chOff x="0" y="0"/>
+          <a:chExt cx="0" cy="0"/>
+        </a:xfrm>
+      </p:grpSpPr>
+      <p:sp>
+        <p:nvSpPr>
+          <p:cNvPr id="6" name="Title 1">
+            <a:extLst>
+              <a:ext uri="{FF2B5EF4-FFF2-40B4-BE49-F238E27FC236}">
+                <a16:creationId xmlns:a16="http://schemas.microsoft.com/office/drawing/2014/main" id="{E865ADEA-C4CB-58A9-0793-7414E84D2949}"/>
+              </a:ext>
+            </a:extLst>
+          </p:cNvPr>
+          <p:cNvSpPr txBox="1">
+            <a:spLocks/>
+          </p:cNvSpPr>
+          <p:nvPr/>
+        </p:nvSpPr>
+        <p:spPr>
+          <a:xfrm>
+            <a:off x="1697383" y="1041400"/>
+            <a:ext cx="5608613" cy="2387600"/>
+          </a:xfrm>
+          <a:prstGeom prst="rect">
+            <a:avLst/>
+          </a:prstGeom>
+        </p:spPr>
+        <p:txBody>
+          <a:bodyPr vert="horz" lIns="91440" tIns="45720" rIns="91440" bIns="45720" rtlCol="0" anchor="ctr">
+            <a:normAutofit fontScale="97500"/>
+          </a:bodyPr>
+          <a:lstStyle>
+            <a:lvl1pPr algn="l" defTabSz="914400" rtl="0" eaLnBrk="1" latinLnBrk="0" hangingPunct="1">
+              <a:lnSpc>
+                <a:spcPct val="90000"/>
+              </a:lnSpc>
+              <a:spcBef>
+                <a:spcPct val="0"/>
+              </a:spcBef>
+              <a:buNone/>
+              <a:defRPr sz="4400" kern="1200">
+                <a:solidFill>
+                  <a:schemeClr val="tx1"/>
+                </a:solidFill>
+                <a:latin typeface="+mj-lt"/>
+                <a:ea typeface="+mj-ea"/>
+                <a:cs typeface="+mj-cs"/>
+              </a:defRPr>
+            </a:lvl1pPr>
+          </a:lstStyle>
+          <a:p>
+            <a:r>
+              <a:rPr lang="en-US" b="1" dirty="0"/>
+              <a:t>Are recommended screening tools </a:t>
+            </a:r>
+            <a:br>
+              <a:rPr lang="en-US" b="1" dirty="0"/>
+            </a:br>
+            <a:r>
+              <a:rPr lang="en-US" b="1" dirty="0"/>
+              <a:t>for adult ADHD useful?</a:t>
+            </a:r>
+          </a:p>
+        </p:txBody>
+      </p:sp>
+      <p:cxnSp>
+        <p:nvCxnSpPr>
+          <p:cNvPr id="8" name="Straight Connector 7">
+            <a:extLst>
+              <a:ext uri="{FF2B5EF4-FFF2-40B4-BE49-F238E27FC236}">
+                <a16:creationId xmlns:a16="http://schemas.microsoft.com/office/drawing/2014/main" id="{C9C7BA76-8B27-12BD-7A5E-51D8AB21B4AE}"/>
+              </a:ext>
+            </a:extLst>
+          </p:cNvPr>
+          <p:cNvCxnSpPr>
+            <a:cxnSpLocks/>
+          </p:cNvCxnSpPr>
+          <p:nvPr/>
+        </p:nvCxnSpPr>
+        <p:spPr>
+          <a:xfrm>
+            <a:off x="1697383" y="1493634"/>
+            <a:ext cx="4178104" cy="859781"/>
+          </a:xfrm>
+          <a:prstGeom prst="line">
+            <a:avLst/>
+          </a:prstGeom>
+          <a:ln w="44450"/>
+        </p:spPr>
+        <p:style>
+          <a:lnRef idx="2">
+            <a:schemeClr val="accent1"/>
+          </a:lnRef>
+          <a:fillRef idx="0">
+            <a:schemeClr val="accent1"/>
+          </a:fillRef>
+          <a:effectRef idx="1">
+            <a:schemeClr val="accent1"/>
+          </a:effectRef>
+          <a:fontRef idx="minor">
+            <a:schemeClr val="tx1"/>
+          </a:fontRef>
+        </p:style>
+      </p:cxnSp>
+      <p:cxnSp>
+        <p:nvCxnSpPr>
+          <p:cNvPr id="9" name="Straight Connector 8">
+            <a:extLst>
+              <a:ext uri="{FF2B5EF4-FFF2-40B4-BE49-F238E27FC236}">
+                <a16:creationId xmlns:a16="http://schemas.microsoft.com/office/drawing/2014/main" id="{038FD6D2-A6A5-8EA8-DE9B-F6F28C07540A}"/>
+              </a:ext>
+            </a:extLst>
+          </p:cNvPr>
+          <p:cNvCxnSpPr>
+            <a:cxnSpLocks/>
+          </p:cNvCxnSpPr>
+          <p:nvPr/>
+        </p:nvCxnSpPr>
+        <p:spPr>
+          <a:xfrm flipV="1">
+            <a:off x="1817934" y="1475533"/>
+            <a:ext cx="4156418" cy="978651"/>
+          </a:xfrm>
+          <a:prstGeom prst="line">
+            <a:avLst/>
+          </a:prstGeom>
+          <a:ln w="44450"/>
+        </p:spPr>
+        <p:style>
+          <a:lnRef idx="2">
+            <a:schemeClr val="accent1"/>
+          </a:lnRef>
+          <a:fillRef idx="0">
+            <a:schemeClr val="accent1"/>
+          </a:fillRef>
+          <a:effectRef idx="1">
+            <a:schemeClr val="accent1"/>
+          </a:effectRef>
+          <a:fontRef idx="minor">
+            <a:schemeClr val="tx1"/>
+          </a:fontRef>
+        </p:style>
+      </p:cxnSp>
+      <p:sp>
+        <p:nvSpPr>
+          <p:cNvPr id="11" name="TextBox 10">
+            <a:extLst>
+              <a:ext uri="{FF2B5EF4-FFF2-40B4-BE49-F238E27FC236}">
+                <a16:creationId xmlns:a16="http://schemas.microsoft.com/office/drawing/2014/main" id="{B0ADAA1B-E513-BC58-CBE7-26891A0368CF}"/>
+              </a:ext>
+            </a:extLst>
+          </p:cNvPr>
+          <p:cNvSpPr txBox="1"/>
+          <p:nvPr/>
+        </p:nvSpPr>
+        <p:spPr>
+          <a:xfrm>
+            <a:off x="2054999" y="657903"/>
+            <a:ext cx="5013424" cy="707886"/>
+          </a:xfrm>
+          <a:prstGeom prst="rect">
+            <a:avLst/>
+          </a:prstGeom>
+          <a:noFill/>
+        </p:spPr>
+        <p:txBody>
+          <a:bodyPr wrap="none" rtlCol="0">
+            <a:spAutoFit/>
+          </a:bodyPr>
+          <a:lstStyle/>
+          <a:p>
+            <a:r>
+              <a:rPr lang="en-US" sz="4000" b="1" dirty="0"/>
+              <a:t>Is the ARSA screener</a:t>
+            </a:r>
+          </a:p>
+        </p:txBody>
+      </p:sp>
+      <p:sp>
+        <p:nvSpPr>
+          <p:cNvPr id="2" name="TextBox 1">
+            <a:extLst>
+              <a:ext uri="{FF2B5EF4-FFF2-40B4-BE49-F238E27FC236}">
+                <a16:creationId xmlns:a16="http://schemas.microsoft.com/office/drawing/2014/main" id="{F0410298-9B75-D717-C252-50E2B10B7BA9}"/>
+              </a:ext>
+            </a:extLst>
+          </p:cNvPr>
+          <p:cNvSpPr txBox="1"/>
+          <p:nvPr/>
+        </p:nvSpPr>
+        <p:spPr>
+          <a:xfrm>
+            <a:off x="2476982" y="3812497"/>
+            <a:ext cx="4467441" cy="584775"/>
+          </a:xfrm>
+          <a:prstGeom prst="rect">
+            <a:avLst/>
+          </a:prstGeom>
+          <a:noFill/>
+        </p:spPr>
+        <p:txBody>
+          <a:bodyPr wrap="none" rtlCol="0">
+            <a:spAutoFit/>
+          </a:bodyPr>
+          <a:lstStyle/>
+          <a:p>
+            <a:r>
+              <a:rPr lang="en-US" sz="3200" dirty="0"/>
+              <a:t>Maybe, but I’m skeptical</a:t>
+            </a:r>
+          </a:p>
+        </p:txBody>
+      </p:sp>
+    </p:spTree>
+    <p:extLst>
+      <p:ext uri="{BB962C8B-B14F-4D97-AF65-F5344CB8AC3E}">
+        <p14:creationId xmlns:p14="http://schemas.microsoft.com/office/powerpoint/2010/main" val="3033204772"/>
+      </p:ext>
+    </p:extLst>
+  </p:cSld>
+  <p:clrMapOvr>
+    <a:masterClrMapping/>
+  </p:clrMapOvr>
+  <p:timing>
+    <p:tnLst>
+      <p:par>
+        <p:cTn id="1" dur="indefinite" restart="never" nodeType="tmRoot">
+          <p:childTnLst>
+            <p:seq concurrent="1" nextAc="seek">
+              <p:cTn id="2" dur="indefinite" nodeType="mainSeq">
+                <p:childTnLst>
+                  <p:par>
+                    <p:cTn id="3" fill="hold">
+                      <p:stCondLst>
+                        <p:cond delay="indefinite"/>
+                      </p:stCondLst>
+                      <p:childTnLst>
+                        <p:par>
+                          <p:cTn id="4" fill="hold">
+                            <p:stCondLst>
+                              <p:cond delay="0"/>
+                            </p:stCondLst>
+                            <p:childTnLst>
+                              <p:par>
+                                <p:cTn id="5" presetID="1" presetClass="entr" presetSubtype="0" fill="hold" grpId="0" nodeType="clickEffect">
+                                  <p:stCondLst>
+                                    <p:cond delay="0"/>
+                                  </p:stCondLst>
+                                  <p:childTnLst>
+                                    <p:set>
+                                      <p:cBhvr>
+                                        <p:cTn id="6" dur="1" fill="hold">
+                                          <p:stCondLst>
+                                            <p:cond delay="0"/>
+                                          </p:stCondLst>
+                                        </p:cTn>
+                                        <p:tgtEl>
+                                          <p:spTgt spid="2"/>
+                                        </p:tgtEl>
+                                        <p:attrNameLst>
+                                          <p:attrName>style.visibility</p:attrName>
+                                        </p:attrNameLst>
+                                      </p:cBhvr>
+                                      <p:to>
+                                        <p:strVal val="visible"/>
+                                      </p:to>
+                                    </p:set>
+                                  </p:childTnLst>
+                                </p:cTn>
+                              </p:par>
+                            </p:childTnLst>
+                          </p:cTn>
+                        </p:par>
+                      </p:childTnLst>
+                    </p:cTn>
+                  </p:par>
+                </p:childTnLst>
+              </p:cTn>
+              <p:prevCondLst>
+                <p:cond evt="onPrev" delay="0">
+                  <p:tgtEl>
+                    <p:sldTgt/>
+                  </p:tgtEl>
+                </p:cond>
+              </p:prevCondLst>
+              <p:nextCondLst>
+                <p:cond evt="onNext" delay="0">
+                  <p:tgtEl>
+                    <p:sldTgt/>
+                  </p:tgtEl>
+                </p:cond>
+              </p:nextCondLst>
+            </p:seq>
+          </p:childTnLst>
+        </p:cTn>
+      </p:par>
+    </p:tnLst>
+    <p:bldLst>
+      <p:bldP spid="2" grpId="0"/>
+    </p:bldLst>
+  </p:timing>
+</p:sld>
+</file>
+
+<file path=ppt/slides/slide16.xml><?xml version="1.0" encoding="utf-8"?>
+<p:sld xmlns:a="http://schemas.openxmlformats.org/drawingml/2006/main" xmlns:r="http://schemas.openxmlformats.org/officeDocument/2006/relationships" xmlns:p="http://schemas.openxmlformats.org/presentationml/2006/main" show="0">
   <p:cSld>
     <p:spTree>
       <p:nvGrpSpPr>
@@ -8136,223 +8721,74 @@
       </p:grpSpPr>
       <p:sp>
         <p:nvSpPr>
-          <p:cNvPr id="4" name="TextBox 3">
+          <p:cNvPr id="2" name="Title 1">
             <a:extLst>
               <a:ext uri="{FF2B5EF4-FFF2-40B4-BE49-F238E27FC236}">
-                <a16:creationId xmlns:a16="http://schemas.microsoft.com/office/drawing/2014/main" id="{7FE70CF0-BC99-6054-6516-D8192B3332C9}"/>
+                <a16:creationId xmlns:a16="http://schemas.microsoft.com/office/drawing/2014/main" id="{CE08F125-9BE4-CD98-13CC-BE81DCDE077A}"/>
               </a:ext>
             </a:extLst>
           </p:cNvPr>
-          <p:cNvSpPr txBox="1"/>
-          <p:nvPr/>
+          <p:cNvSpPr>
+            <a:spLocks noGrp="1"/>
+          </p:cNvSpPr>
+          <p:nvPr>
+            <p:ph type="ctrTitle"/>
+          </p:nvPr>
         </p:nvSpPr>
         <p:spPr>
           <a:xfrm>
-            <a:off x="489098" y="223284"/>
-            <a:ext cx="6783572" cy="584775"/>
+            <a:off x="685800" y="1297461"/>
+            <a:ext cx="7772400" cy="2387600"/>
           </a:xfrm>
-          <a:prstGeom prst="rect">
-            <a:avLst/>
-          </a:prstGeom>
-          <a:noFill/>
         </p:spPr>
         <p:txBody>
-          <a:bodyPr wrap="square" rtlCol="0">
-            <a:spAutoFit/>
+          <a:bodyPr>
+            <a:normAutofit fontScale="90000"/>
           </a:bodyPr>
           <a:lstStyle/>
           <a:p>
             <a:r>
-              <a:rPr lang="en-US" sz="3200" b="1" dirty="0"/>
-              <a:t>Why does anyone care?</a:t>
+              <a:rPr lang="en-US" b="1" dirty="0"/>
+              <a:t>Are the recommended screening tools for adult ADHD useful?</a:t>
             </a:r>
           </a:p>
         </p:txBody>
       </p:sp>
-      <p:pic>
-        <p:nvPicPr>
-          <p:cNvPr id="5" name="Picture 4">
+      <p:sp>
+        <p:nvSpPr>
+          <p:cNvPr id="3" name="Subtitle 2">
             <a:extLst>
               <a:ext uri="{FF2B5EF4-FFF2-40B4-BE49-F238E27FC236}">
-                <a16:creationId xmlns:a16="http://schemas.microsoft.com/office/drawing/2014/main" id="{4539A03F-3EA0-BC96-44F2-6255DFB655C2}"/>
+                <a16:creationId xmlns:a16="http://schemas.microsoft.com/office/drawing/2014/main" id="{4E86D373-40CD-123A-B14A-85B35FF4444F}"/>
               </a:ext>
             </a:extLst>
           </p:cNvPr>
-          <p:cNvPicPr>
-            <a:picLocks noChangeAspect="1"/>
-          </p:cNvPicPr>
-          <p:nvPr/>
-        </p:nvPicPr>
-        <p:blipFill>
-          <a:blip r:embed="rId2"/>
-          <a:stretch>
-            <a:fillRect/>
-          </a:stretch>
-        </p:blipFill>
+          <p:cNvSpPr>
+            <a:spLocks noGrp="1"/>
+          </p:cNvSpPr>
+          <p:nvPr>
+            <p:ph type="subTitle" idx="1"/>
+          </p:nvPr>
+        </p:nvSpPr>
         <p:spPr>
           <a:xfrm>
-            <a:off x="3029544" y="3742659"/>
-            <a:ext cx="3908347" cy="2678867"/>
+            <a:off x="1143000" y="4177152"/>
+            <a:ext cx="6858000" cy="1655762"/>
           </a:xfrm>
-          <a:prstGeom prst="rect">
-            <a:avLst/>
-          </a:prstGeom>
-        </p:spPr>
-      </p:pic>
-      <p:pic>
-        <p:nvPicPr>
-          <p:cNvPr id="1026" name="Picture 2" descr="OHSU Primary Care Clinic Gabriel Park building photo">
-            <a:extLst>
-              <a:ext uri="{FF2B5EF4-FFF2-40B4-BE49-F238E27FC236}">
-                <a16:creationId xmlns:a16="http://schemas.microsoft.com/office/drawing/2014/main" id="{6A0A4686-4657-DA59-5897-EEE2B728BF1F}"/>
-              </a:ext>
-            </a:extLst>
-          </p:cNvPr>
-          <p:cNvPicPr>
-            <a:picLocks noChangeAspect="1" noChangeArrowheads="1"/>
-          </p:cNvPicPr>
-          <p:nvPr/>
-        </p:nvPicPr>
-        <p:blipFill rotWithShape="1">
-          <a:blip r:embed="rId3">
-            <a:extLst>
-              <a:ext uri="{28A0092B-C50C-407E-A947-70E740481C1C}">
-                <a14:useLocalDpi xmlns:a14="http://schemas.microsoft.com/office/drawing/2010/main" val="0"/>
-              </a:ext>
-            </a:extLst>
-          </a:blip>
-          <a:srcRect l="16161" t="50000" r="13828"/>
-          <a:stretch/>
-        </p:blipFill>
-        <p:spPr bwMode="auto">
-          <a:xfrm>
-            <a:off x="1920588" y="943639"/>
-            <a:ext cx="5843058" cy="2908004"/>
-          </a:xfrm>
-          <a:prstGeom prst="rect">
-            <a:avLst/>
-          </a:prstGeom>
-          <a:noFill/>
-          <a:extLst>
-            <a:ext uri="{909E8E84-426E-40DD-AFC4-6F175D3DCCD1}">
-              <a14:hiddenFill xmlns:a14="http://schemas.microsoft.com/office/drawing/2010/main">
-                <a:solidFill>
-                  <a:srgbClr val="FFFFFF"/>
-                </a:solidFill>
-              </a14:hiddenFill>
-            </a:ext>
-          </a:extLst>
-        </p:spPr>
-      </p:pic>
-      <p:sp>
-        <p:nvSpPr>
-          <p:cNvPr id="6" name="5-Point Star 5">
-            <a:extLst>
-              <a:ext uri="{FF2B5EF4-FFF2-40B4-BE49-F238E27FC236}">
-                <a16:creationId xmlns:a16="http://schemas.microsoft.com/office/drawing/2014/main" id="{4601E845-449F-6D2F-A72D-B141945925BB}"/>
-              </a:ext>
-            </a:extLst>
-          </p:cNvPr>
-          <p:cNvSpPr/>
-          <p:nvPr/>
-        </p:nvSpPr>
-        <p:spPr>
-          <a:xfrm>
-            <a:off x="3285460" y="5826642"/>
-            <a:ext cx="255182" cy="202018"/>
-          </a:xfrm>
-          <a:prstGeom prst="star5">
-            <a:avLst/>
-          </a:prstGeom>
-          <a:solidFill>
-            <a:schemeClr val="accent5">
-              <a:lumMod val="20000"/>
-              <a:lumOff val="80000"/>
-            </a:schemeClr>
-          </a:solidFill>
-        </p:spPr>
-        <p:style>
-          <a:lnRef idx="2">
-            <a:schemeClr val="accent1">
-              <a:shade val="15000"/>
-            </a:schemeClr>
-          </a:lnRef>
-          <a:fillRef idx="1">
-            <a:schemeClr val="accent1"/>
-          </a:fillRef>
-          <a:effectRef idx="0">
-            <a:schemeClr val="accent1"/>
-          </a:effectRef>
-          <a:fontRef idx="minor">
-            <a:schemeClr val="lt1"/>
-          </a:fontRef>
-        </p:style>
-        <p:txBody>
-          <a:bodyPr rtlCol="0" anchor="ctr"/>
-          <a:lstStyle/>
-          <a:p>
-            <a:pPr algn="ctr"/>
-            <a:endParaRPr lang="en-US" dirty="0"/>
-          </a:p>
-        </p:txBody>
-      </p:sp>
-      <p:sp>
-        <p:nvSpPr>
-          <p:cNvPr id="7" name="TextBox 6">
-            <a:extLst>
-              <a:ext uri="{FF2B5EF4-FFF2-40B4-BE49-F238E27FC236}">
-                <a16:creationId xmlns:a16="http://schemas.microsoft.com/office/drawing/2014/main" id="{9F1476CD-6F5F-F09B-F90D-0936BDE2DDFB}"/>
-              </a:ext>
-            </a:extLst>
-          </p:cNvPr>
-          <p:cNvSpPr txBox="1"/>
-          <p:nvPr/>
-        </p:nvSpPr>
-        <p:spPr>
-          <a:xfrm>
-            <a:off x="13248" y="5831795"/>
-            <a:ext cx="2569037" cy="923330"/>
-          </a:xfrm>
-          <a:prstGeom prst="rect">
-            <a:avLst/>
-          </a:prstGeom>
-          <a:noFill/>
         </p:spPr>
         <p:txBody>
-          <a:bodyPr wrap="none" rtlCol="0">
-            <a:spAutoFit/>
-          </a:bodyPr>
+          <a:bodyPr/>
           <a:lstStyle/>
           <a:p>
             <a:r>
-              <a:rPr lang="en-US" b="1" dirty="0"/>
-              <a:t>Sources:</a:t>
-            </a:r>
-            <a:r>
               <a:rPr lang="en-US" dirty="0"/>
-              <a:t> </a:t>
-            </a:r>
-            <a:r>
-              <a:rPr lang="en-US" dirty="0" err="1"/>
-              <a:t>OHSU.edu</a:t>
-            </a:r>
-            <a:endParaRPr lang="en-US" dirty="0"/>
-          </a:p>
-          <a:p>
-            <a:r>
-              <a:rPr lang="en-US" dirty="0" err="1"/>
-              <a:t>BestNeighborhood.org</a:t>
-            </a:r>
+              <a:t>Steve White</a:t>
+            </a:r>
+          </a:p>
+          <a:p>
             <a:r>
               <a:rPr lang="en-US" dirty="0"/>
-              <a:t>,</a:t>
-            </a:r>
-            <a:br>
-              <a:rPr lang="en-US" dirty="0"/>
-            </a:br>
-            <a:r>
-              <a:rPr lang="en-US" dirty="0"/>
-              <a:t>(from IPUMS ACS data?)</a:t>
+              <a:t>2/20/25</a:t>
             </a:r>
           </a:p>
         </p:txBody>
@@ -8360,7 +8796,7 @@
     </p:spTree>
     <p:extLst>
       <p:ext uri="{BB962C8B-B14F-4D97-AF65-F5344CB8AC3E}">
-        <p14:creationId xmlns:p14="http://schemas.microsoft.com/office/powerpoint/2010/main" val="3322414952"/>
+        <p14:creationId xmlns:p14="http://schemas.microsoft.com/office/powerpoint/2010/main" val="228523529"/>
       </p:ext>
     </p:extLst>
   </p:cSld>
@@ -8509,7 +8945,7 @@
             </a:pPr>
             <a:r>
               <a:rPr lang="en-US" i="1" dirty="0"/>
-              <a:t>Small APA:</a:t>
+              <a:t>Little APA:</a:t>
             </a:r>
             <a:r>
               <a:rPr lang="en-US" dirty="0"/>
@@ -8679,13 +9115,15 @@
               </a:ext>
             </a:extLst>
           </p:cNvPr>
-          <p:cNvCxnSpPr/>
+          <p:cNvCxnSpPr>
+            <a:cxnSpLocks/>
+          </p:cNvCxnSpPr>
           <p:nvPr/>
         </p:nvCxnSpPr>
         <p:spPr>
           <a:xfrm flipH="1">
-            <a:off x="3403600" y="2323642"/>
-            <a:ext cx="1511300" cy="648158"/>
+            <a:off x="3200400" y="2323642"/>
+            <a:ext cx="1714500" cy="693878"/>
           </a:xfrm>
           <a:prstGeom prst="straightConnector1">
             <a:avLst/>
@@ -8811,26 +9249,35 @@
                                   </p:childTnLst>
                                 </p:cTn>
                               </p:par>
-                            </p:childTnLst>
-                          </p:cTn>
-                        </p:par>
-                      </p:childTnLst>
-                    </p:cTn>
-                  </p:par>
-                  <p:par>
-                    <p:cTn id="7" fill="hold">
-                      <p:stCondLst>
-                        <p:cond delay="indefinite"/>
-                      </p:stCondLst>
-                      <p:childTnLst>
-                        <p:par>
-                          <p:cTn id="8" fill="hold">
-                            <p:stCondLst>
-                              <p:cond delay="0"/>
-                            </p:stCondLst>
-                            <p:childTnLst>
                               <p:par>
-                                <p:cTn id="9" presetID="1" presetClass="entr" presetSubtype="0" fill="hold" nodeType="clickEffect">
+                                <p:cTn id="7" presetID="1" presetClass="entr" presetSubtype="0" fill="hold" nodeType="withEffect">
+                                  <p:stCondLst>
+                                    <p:cond delay="0"/>
+                                  </p:stCondLst>
+                                  <p:childTnLst>
+                                    <p:set>
+                                      <p:cBhvr>
+                                        <p:cTn id="8" dur="1" fill="hold">
+                                          <p:stCondLst>
+                                            <p:cond delay="0"/>
+                                          </p:stCondLst>
+                                        </p:cTn>
+                                        <p:tgtEl>
+                                          <p:spTgt spid="8"/>
+                                        </p:tgtEl>
+                                        <p:attrNameLst>
+                                          <p:attrName>style.visibility</p:attrName>
+                                        </p:attrNameLst>
+                                      </p:cBhvr>
+                                      <p:to>
+                                        <p:strVal val="visible"/>
+                                      </p:to>
+                                    </p:set>
+                                  </p:childTnLst>
+                                </p:cTn>
+                              </p:par>
+                              <p:par>
+                                <p:cTn id="9" presetID="1" presetClass="entr" presetSubtype="0" fill="hold" nodeType="withEffect">
                                   <p:stCondLst>
                                     <p:cond delay="0"/>
                                   </p:stCondLst>
@@ -8843,11 +9290,7 @@
                                           </p:stCondLst>
                                         </p:cTn>
                                         <p:tgtEl>
-                                          <p:spTgt spid="3">
-                                            <p:txEl>
-                                              <p:pRg st="2" end="2"/>
-                                            </p:txEl>
-                                          </p:spTgt>
+                                          <p:spTgt spid="4"/>
                                         </p:tgtEl>
                                         <p:attrNameLst>
                                           <p:attrName>style.visibility</p:attrName>
@@ -8874,7 +9317,7 @@
                                           </p:stCondLst>
                                         </p:cTn>
                                         <p:tgtEl>
-                                          <p:spTgt spid="12"/>
+                                          <p:spTgt spid="9"/>
                                         </p:tgtEl>
                                         <p:attrNameLst>
                                           <p:attrName>style.visibility</p:attrName>
@@ -8901,7 +9344,7 @@
                                           </p:stCondLst>
                                         </p:cTn>
                                         <p:tgtEl>
-                                          <p:spTgt spid="10"/>
+                                          <p:spTgt spid="7"/>
                                         </p:tgtEl>
                                         <p:attrNameLst>
                                           <p:attrName>style.visibility</p:attrName>
@@ -8948,7 +9391,7 @@
                                         <p:tgtEl>
                                           <p:spTgt spid="3">
                                             <p:txEl>
-                                              <p:pRg st="3" end="3"/>
+                                              <p:pRg st="2" end="2"/>
                                             </p:txEl>
                                           </p:spTgt>
                                         </p:tgtEl>
@@ -8977,7 +9420,7 @@
                                           </p:stCondLst>
                                         </p:cTn>
                                         <p:tgtEl>
-                                          <p:spTgt spid="13"/>
+                                          <p:spTgt spid="12"/>
                                         </p:tgtEl>
                                         <p:attrNameLst>
                                           <p:attrName>style.visibility</p:attrName>
@@ -9004,7 +9447,7 @@
                                           </p:stCondLst>
                                         </p:cTn>
                                         <p:tgtEl>
-                                          <p:spTgt spid="5"/>
+                                          <p:spTgt spid="10"/>
                                         </p:tgtEl>
                                         <p:attrNameLst>
                                           <p:attrName>style.visibility</p:attrName>
@@ -9049,7 +9492,11 @@
                                           </p:stCondLst>
                                         </p:cTn>
                                         <p:tgtEl>
-                                          <p:spTgt spid="8"/>
+                                          <p:spTgt spid="3">
+                                            <p:txEl>
+                                              <p:pRg st="3" end="3"/>
+                                            </p:txEl>
+                                          </p:spTgt>
                                         </p:tgtEl>
                                         <p:attrNameLst>
                                           <p:attrName>style.visibility</p:attrName>
@@ -9076,7 +9523,7 @@
                                           </p:stCondLst>
                                         </p:cTn>
                                         <p:tgtEl>
-                                          <p:spTgt spid="4"/>
+                                          <p:spTgt spid="13"/>
                                         </p:tgtEl>
                                         <p:attrNameLst>
                                           <p:attrName>style.visibility</p:attrName>
@@ -9103,7 +9550,7 @@
                                           </p:stCondLst>
                                         </p:cTn>
                                         <p:tgtEl>
-                                          <p:spTgt spid="9"/>
+                                          <p:spTgt spid="5"/>
                                         </p:tgtEl>
                                         <p:attrNameLst>
                                           <p:attrName>style.visibility</p:attrName>
@@ -9587,7 +10034,7 @@
             </a:pPr>
             <a:r>
               <a:rPr lang="en-US" sz="2000" dirty="0"/>
-              <a:t>Response options are “never,” “rarely,” “sometimes,” ”often,” and “very often.”</a:t>
+              <a:t>Response options are “never,” “rarely,” “sometimes,” “often,” and “very often.”</a:t>
             </a:r>
             <a:br>
               <a:rPr lang="en-US" sz="2000" dirty="0"/>
@@ -10251,33 +10698,15 @@
                                   </p:childTnLst>
                                 </p:cTn>
                               </p:par>
-                            </p:childTnLst>
-                          </p:cTn>
-                        </p:par>
-                      </p:childTnLst>
-                    </p:cTn>
-                  </p:par>
-                  <p:par>
-                    <p:cTn id="7" fill="hold">
-                      <p:stCondLst>
-                        <p:cond delay="indefinite"/>
-                      </p:stCondLst>
-                      <p:childTnLst>
-                        <p:par>
-                          <p:cTn id="8" fill="hold">
-                            <p:stCondLst>
-                              <p:cond delay="0"/>
-                            </p:stCondLst>
-                            <p:childTnLst>
                               <p:par>
-                                <p:cTn id="9" presetID="1" presetClass="entr" presetSubtype="0" fill="hold" nodeType="clickEffect">
+                                <p:cTn id="7" presetID="1" presetClass="entr" presetSubtype="0" fill="hold" nodeType="withEffect">
                                   <p:stCondLst>
                                     <p:cond delay="0"/>
                                   </p:stCondLst>
                                   <p:childTnLst>
                                     <p:set>
                                       <p:cBhvr>
-                                        <p:cTn id="10" dur="1" fill="hold">
+                                        <p:cTn id="8" dur="1" fill="hold">
                                           <p:stCondLst>
                                             <p:cond delay="0"/>
                                           </p:stCondLst>
@@ -10297,14 +10726,14 @@
                                 </p:cTn>
                               </p:par>
                               <p:par>
-                                <p:cTn id="11" presetID="1" presetClass="entr" presetSubtype="0" fill="hold" grpId="0" nodeType="withEffect">
+                                <p:cTn id="9" presetID="1" presetClass="entr" presetSubtype="0" fill="hold" grpId="0" nodeType="withEffect">
                                   <p:stCondLst>
                                     <p:cond delay="0"/>
                                   </p:stCondLst>
                                   <p:childTnLst>
                                     <p:set>
                                       <p:cBhvr>
-                                        <p:cTn id="12" dur="1" fill="hold">
+                                        <p:cTn id="10" dur="1" fill="hold">
                                           <p:stCondLst>
                                             <p:cond delay="0"/>
                                           </p:stCondLst>
@@ -10330,26 +10759,26 @@
                     </p:cTn>
                   </p:par>
                   <p:par>
-                    <p:cTn id="13" fill="hold">
+                    <p:cTn id="11" fill="hold">
                       <p:stCondLst>
                         <p:cond delay="indefinite"/>
                       </p:stCondLst>
                       <p:childTnLst>
                         <p:par>
-                          <p:cTn id="14" fill="hold">
+                          <p:cTn id="12" fill="hold">
                             <p:stCondLst>
                               <p:cond delay="0"/>
                             </p:stCondLst>
                             <p:childTnLst>
                               <p:par>
-                                <p:cTn id="15" presetID="1" presetClass="entr" presetSubtype="0" fill="hold" grpId="0" nodeType="clickEffect">
+                                <p:cTn id="13" presetID="1" presetClass="entr" presetSubtype="0" fill="hold" grpId="0" nodeType="clickEffect">
                                   <p:stCondLst>
                                     <p:cond delay="0"/>
                                   </p:stCondLst>
                                   <p:childTnLst>
                                     <p:set>
                                       <p:cBhvr>
-                                        <p:cTn id="16" dur="1" fill="hold">
+                                        <p:cTn id="14" dur="1" fill="hold">
                                           <p:stCondLst>
                                             <p:cond delay="0"/>
                                           </p:stCondLst>
@@ -10368,33 +10797,15 @@
                                   </p:childTnLst>
                                 </p:cTn>
                               </p:par>
-                            </p:childTnLst>
-                          </p:cTn>
-                        </p:par>
-                      </p:childTnLst>
-                    </p:cTn>
-                  </p:par>
-                  <p:par>
-                    <p:cTn id="17" fill="hold">
-                      <p:stCondLst>
-                        <p:cond delay="indefinite"/>
-                      </p:stCondLst>
-                      <p:childTnLst>
-                        <p:par>
-                          <p:cTn id="18" fill="hold">
-                            <p:stCondLst>
-                              <p:cond delay="0"/>
-                            </p:stCondLst>
-                            <p:childTnLst>
                               <p:par>
-                                <p:cTn id="19" presetID="1" presetClass="entr" presetSubtype="0" fill="hold" nodeType="clickEffect">
+                                <p:cTn id="15" presetID="1" presetClass="entr" presetSubtype="0" fill="hold" nodeType="withEffect">
                                   <p:stCondLst>
                                     <p:cond delay="0"/>
                                   </p:stCondLst>
                                   <p:childTnLst>
                                     <p:set>
                                       <p:cBhvr>
-                                        <p:cTn id="20" dur="1" fill="hold">
+                                        <p:cTn id="16" dur="1" fill="hold">
                                           <p:stCondLst>
                                             <p:cond delay="0"/>
                                           </p:stCondLst>
@@ -10414,14 +10825,14 @@
                                 </p:cTn>
                               </p:par>
                               <p:par>
-                                <p:cTn id="21" presetID="1" presetClass="entr" presetSubtype="0" fill="hold" grpId="0" nodeType="withEffect">
+                                <p:cTn id="17" presetID="1" presetClass="entr" presetSubtype="0" fill="hold" grpId="0" nodeType="withEffect">
                                   <p:stCondLst>
                                     <p:cond delay="0"/>
                                   </p:stCondLst>
                                   <p:childTnLst>
                                     <p:set>
                                       <p:cBhvr>
-                                        <p:cTn id="22" dur="1" fill="hold">
+                                        <p:cTn id="18" dur="1" fill="hold">
                                           <p:stCondLst>
                                             <p:cond delay="0"/>
                                           </p:stCondLst>
@@ -11080,7 +11491,7 @@
         </p:nvSpPr>
         <p:spPr>
           <a:xfrm>
-            <a:off x="5232400" y="2143841"/>
+            <a:off x="4207510" y="2180752"/>
             <a:ext cx="127000" cy="114300"/>
           </a:xfrm>
           <a:prstGeom prst="ellipse">
@@ -11717,10 +12128,10 @@
       </p:graphicFrame>
       <p:sp>
         <p:nvSpPr>
-          <p:cNvPr id="9" name="Oval 8">
+          <p:cNvPr id="10" name="Oval 9">
             <a:extLst>
               <a:ext uri="{FF2B5EF4-FFF2-40B4-BE49-F238E27FC236}">
-                <a16:creationId xmlns:a16="http://schemas.microsoft.com/office/drawing/2014/main" id="{8F6D7F33-799B-DD9F-E744-DF3C22E9A58F}"/>
+                <a16:creationId xmlns:a16="http://schemas.microsoft.com/office/drawing/2014/main" id="{87C90FCF-A500-75BA-FB77-A5A8FFECF19A}"/>
               </a:ext>
             </a:extLst>
           </p:cNvPr>
@@ -11729,7 +12140,7 @@
         </p:nvSpPr>
         <p:spPr>
           <a:xfrm>
-            <a:off x="5232400" y="2143841"/>
+            <a:off x="3549650" y="2332957"/>
             <a:ext cx="127000" cy="114300"/>
           </a:xfrm>
           <a:prstGeom prst="ellipse">
@@ -11763,10 +12174,10 @@
       </p:sp>
       <p:sp>
         <p:nvSpPr>
-          <p:cNvPr id="10" name="Oval 9">
+          <p:cNvPr id="5" name="Oval 4">
             <a:extLst>
               <a:ext uri="{FF2B5EF4-FFF2-40B4-BE49-F238E27FC236}">
-                <a16:creationId xmlns:a16="http://schemas.microsoft.com/office/drawing/2014/main" id="{87C90FCF-A500-75BA-FB77-A5A8FFECF19A}"/>
+                <a16:creationId xmlns:a16="http://schemas.microsoft.com/office/drawing/2014/main" id="{7BF23B21-D49D-B9C2-3253-5682A5701196}"/>
               </a:ext>
             </a:extLst>
           </p:cNvPr>
@@ -11775,7 +12186,7 @@
         </p:nvSpPr>
         <p:spPr>
           <a:xfrm>
-            <a:off x="3549650" y="2332957"/>
+            <a:off x="4207510" y="2180752"/>
             <a:ext cx="127000" cy="114300"/>
           </a:xfrm>
           <a:prstGeom prst="ellipse">
@@ -12412,52 +12823,6 @@
       </p:graphicFrame>
       <p:sp>
         <p:nvSpPr>
-          <p:cNvPr id="9" name="Oval 8">
-            <a:extLst>
-              <a:ext uri="{FF2B5EF4-FFF2-40B4-BE49-F238E27FC236}">
-                <a16:creationId xmlns:a16="http://schemas.microsoft.com/office/drawing/2014/main" id="{9C3226E1-E1FF-F1D8-BECE-0AF452FAFC86}"/>
-              </a:ext>
-            </a:extLst>
-          </p:cNvPr>
-          <p:cNvSpPr/>
-          <p:nvPr/>
-        </p:nvSpPr>
-        <p:spPr>
-          <a:xfrm>
-            <a:off x="5232400" y="2143841"/>
-            <a:ext cx="127000" cy="114300"/>
-          </a:xfrm>
-          <a:prstGeom prst="ellipse">
-            <a:avLst/>
-          </a:prstGeom>
-        </p:spPr>
-        <p:style>
-          <a:lnRef idx="2">
-            <a:schemeClr val="dk1">
-              <a:shade val="15000"/>
-            </a:schemeClr>
-          </a:lnRef>
-          <a:fillRef idx="1">
-            <a:schemeClr val="dk1"/>
-          </a:fillRef>
-          <a:effectRef idx="0">
-            <a:schemeClr val="dk1"/>
-          </a:effectRef>
-          <a:fontRef idx="minor">
-            <a:schemeClr val="lt1"/>
-          </a:fontRef>
-        </p:style>
-        <p:txBody>
-          <a:bodyPr rtlCol="0" anchor="ctr"/>
-          <a:lstStyle/>
-          <a:p>
-            <a:pPr algn="ctr"/>
-            <a:endParaRPr lang="en-US"/>
-          </a:p>
-        </p:txBody>
-      </p:sp>
-      <p:sp>
-        <p:nvSpPr>
           <p:cNvPr id="10" name="Oval 9">
             <a:extLst>
               <a:ext uri="{FF2B5EF4-FFF2-40B4-BE49-F238E27FC236}">
@@ -12517,6 +12882,52 @@
         <p:spPr>
           <a:xfrm>
             <a:off x="3114900" y="2475116"/>
+            <a:ext cx="127000" cy="114300"/>
+          </a:xfrm>
+          <a:prstGeom prst="ellipse">
+            <a:avLst/>
+          </a:prstGeom>
+        </p:spPr>
+        <p:style>
+          <a:lnRef idx="2">
+            <a:schemeClr val="dk1">
+              <a:shade val="15000"/>
+            </a:schemeClr>
+          </a:lnRef>
+          <a:fillRef idx="1">
+            <a:schemeClr val="dk1"/>
+          </a:fillRef>
+          <a:effectRef idx="0">
+            <a:schemeClr val="dk1"/>
+          </a:effectRef>
+          <a:fontRef idx="minor">
+            <a:schemeClr val="lt1"/>
+          </a:fontRef>
+        </p:style>
+        <p:txBody>
+          <a:bodyPr rtlCol="0" anchor="ctr"/>
+          <a:lstStyle/>
+          <a:p>
+            <a:pPr algn="ctr"/>
+            <a:endParaRPr lang="en-US"/>
+          </a:p>
+        </p:txBody>
+      </p:sp>
+      <p:sp>
+        <p:nvSpPr>
+          <p:cNvPr id="5" name="Oval 4">
+            <a:extLst>
+              <a:ext uri="{FF2B5EF4-FFF2-40B4-BE49-F238E27FC236}">
+                <a16:creationId xmlns:a16="http://schemas.microsoft.com/office/drawing/2014/main" id="{3CCA506D-C02A-6513-7F40-A0D4F2452E29}"/>
+              </a:ext>
+            </a:extLst>
+          </p:cNvPr>
+          <p:cNvSpPr/>
+          <p:nvPr/>
+        </p:nvSpPr>
+        <p:spPr>
+          <a:xfrm>
+            <a:off x="4207510" y="2180752"/>
             <a:ext cx="127000" cy="114300"/>
           </a:xfrm>
           <a:prstGeom prst="ellipse">
